--- a/downloads/UniverCell_Briefing_Deck.pptx
+++ b/downloads/UniverCell_Briefing_Deck.pptx
@@ -544,7 +544,7 @@
           </a:p>
           <a:p>
             <a:r>
-              <a:t>- Set the clock. Fifteen slides, about eighteen minutes, and everything deeper is in the PDF. CEOs relax when they know the shape.</a:t>
+              <a:t>- Set the clock. Sixteen slides, about eighteen minutes, and everything deeper is in the PDF. CEOs relax when they know the shape.</a:t>
             </a:r>
           </a:p>
           <a:p>
@@ -555,7 +555,7 @@
           <a:p/>
           <a:p>
             <a:r>
-              <a:t>IF ASKED: "Why this company?" Because it is small enough to understand completely, and because its strategy is the opposite of the one that destroyed ₹1.6 lakh crore in Europe. It is a controlled experiment.</a:t>
+              <a:t>IF ASKED: "Why this company?" Because it is small enough to understand completely, and because its strategy is the opposite of the one that destroyed ₹1.5 lakh crore in Europe. It is a controlled experiment.</a:t>
             </a:r>
           </a:p>
         </p:txBody>
@@ -883,7 +883,7 @@
           </a:p>
           <a:p>
             <a:r>
-              <a:t>- Supplier power is the one brutal force in both, at 4, and it is the one UniverCell cannot fix. 90% of cathode, 98% of anode, under a licensing regime. The sodium-ion work with Litona is the only visible hedge.</a:t>
+              <a:t>- Supplier power is the one brutal force in both, at 4, and it is the one UniverCell cannot fix. 85% of cathode and over 90% of anode material, under a licensing regime. The sodium-ion work with Litona is the only visible hedge.</a:t>
             </a:r>
           </a:p>
           <a:p>
@@ -1222,7 +1222,7 @@
           <a:p/>
           <a:p>
             <a:r>
-              <a:t>- Open with his number. ₹38,900 crore of cell imports in calendar 2025, up 44% by value and 75% by volume, about 93% from China. India is absorbing the price collapse, not escaping the dependence.</a:t>
+              <a:t>- Open with his number. ₹38,900 crore of cell imports in calendar 2025, up 44% by value against 12% by the pieces India actually reports, about 93% from China. Value is outrunning volume, which is a shift to bigger cells and packs, not a price collapse being absorbed.</a:t>
             </a:r>
           </a:p>
           <a:p>
@@ -1468,12 +1468,12 @@
           </a:p>
           <a:p>
             <a:r>
-              <a:t>- 98% anode: the point is that the chokepoint is processing, not mining. Buying a lithium mine does not fix it.</a:t>
-            </a:r>
-          </a:p>
-          <a:p>
-            <a:r>
-              <a:t>- ₹1.6 lakh crore: this is the base rate. Any European battery proposal he sees has to clear it.</a:t>
+              <a:t>- 98% graphitisation: the point is that the chokepoint is processing, not mining. Buying a lithium mine does not fix it.</a:t>
+            </a:r>
+          </a:p>
+          <a:p>
+            <a:r>
+              <a:t>- ₹1.5 lakh crore: this is the base rate. Any European battery proposal he sees has to clear it.</a:t>
             </a:r>
           </a:p>
           <a:p>
@@ -1684,7 +1684,7 @@
           <a:p/>
           <a:p>
             <a:r>
-              <a:t>- Walk the bars top down. 98% of anode material, 94% of battery-grade graphite, 90% of cathode, 85% of cell capacity. Then the bottom bar: only about 16% of lithium mining. That contrast is the whole slide.</a:t>
+              <a:t>- Walk the bars top down. 94% of graphite refining, over 90% of anode material, 85% of cathode, over 80% of cells. Then the bottom bar: only about 17% of lithium mining. That contrast is the whole slide.</a:t>
             </a:r>
           </a:p>
           <a:p>
@@ -1792,7 +1792,7 @@
           <a:p/>
           <a:p>
             <a:r>
-              <a:t>- Top chart, lead with Germany. ₹2.7 lakh crore, the largest importer in the world, and it overtook the United States in May 2025. That usually surprises people who assume the US is the big buyer.</a:t>
+              <a:t>- Top chart, lead with Germany. ₹2.7 lakh crore, the largest importer in the world, and it has been ahead of the United States since 2023. That usually surprises people who assume the US is the big buyer.</a:t>
             </a:r>
           </a:p>
           <a:p>
@@ -10984,7 +10984,7 @@
                 </a:solidFill>
                 <a:latin typeface="Arial"/>
               </a:rPr>
-              <a:t>China, about 85%</a:t>
+              <a:t>China, over 80%</a:t>
             </a:r>
           </a:p>
         </p:txBody>
@@ -14740,7 +14740,7 @@
                 </a:solidFill>
                 <a:latin typeface="Arial"/>
               </a:rPr>
-              <a:t>China holds 90% of cathode and 98% of anode material, under licence rules. Their sodium-ion work is the only visible hedge.</a:t>
+              <a:t>China holds 85% of cathode and over 90% of anode material, under licence rules. Their sodium-ion work is the only visible hedge.</a:t>
             </a:r>
           </a:p>
         </p:txBody>
@@ -20861,7 +20861,7 @@
                 </a:solidFill>
                 <a:latin typeface="Arial"/>
               </a:rPr>
-              <a:t>What India spends on imported cells</a:t>
+              <a:t>What India spends on imported lithium-ion batteries</a:t>
             </a:r>
           </a:p>
         </p:txBody>
@@ -20896,7 +20896,7 @@
                 </a:solidFill>
                 <a:latin typeface="Arial"/>
               </a:rPr>
-              <a:t>₹ crore, product code 850760</a:t>
+              <a:t>₹ crore, code 850760: cells, modules and packs</a:t>
             </a:r>
           </a:p>
         </p:txBody>
@@ -21175,8 +21175,8 @@
         </p:nvSpPr>
         <p:spPr>
           <a:xfrm>
-            <a:off x="1600748" y="3825452"/>
-            <a:ext cx="456102" cy="97323"/>
+            <a:off x="1600748" y="3612578"/>
+            <a:ext cx="456102" cy="310197"/>
           </a:xfrm>
           <a:prstGeom prst="rect">
             <a:avLst/>
@@ -21217,7 +21217,7 @@
         </p:nvSpPr>
         <p:spPr>
           <a:xfrm>
-            <a:off x="1545884" y="3610568"/>
+            <a:off x="1545884" y="3397694"/>
             <a:ext cx="565830" cy="182880"/>
           </a:xfrm>
           <a:prstGeom prst="rect">
@@ -21239,7 +21239,7 @@
                 </a:solidFill>
                 <a:latin typeface="Arial"/>
               </a:rPr>
-              <a:t>₹3.7k cr</a:t>
+              <a:t>₹11.7k cr</a:t>
             </a:r>
           </a:p>
         </p:txBody>
@@ -21287,8 +21287,8 @@
         </p:nvSpPr>
         <p:spPr>
           <a:xfrm>
-            <a:off x="2387132" y="3214249"/>
-            <a:ext cx="456102" cy="708526"/>
+            <a:off x="2387132" y="3195491"/>
+            <a:ext cx="456102" cy="727284"/>
           </a:xfrm>
           <a:prstGeom prst="rect">
             <a:avLst/>
@@ -21329,7 +21329,7 @@
         </p:nvSpPr>
         <p:spPr>
           <a:xfrm>
-            <a:off x="2332268" y="2999365"/>
+            <a:off x="2332268" y="2980607"/>
             <a:ext cx="565830" cy="182880"/>
           </a:xfrm>
           <a:prstGeom prst="rect">
@@ -21351,7 +21351,7 @@
                 </a:solidFill>
                 <a:latin typeface="Arial"/>
               </a:rPr>
-              <a:t>₹26.7k cr</a:t>
+              <a:t>₹27.4k cr</a:t>
             </a:r>
           </a:p>
         </p:txBody>
@@ -21399,8 +21399,8 @@
         </p:nvSpPr>
         <p:spPr>
           <a:xfrm>
-            <a:off x="3173516" y="3204392"/>
-            <a:ext cx="456102" cy="718383"/>
+            <a:off x="3173516" y="3204418"/>
+            <a:ext cx="456102" cy="718357"/>
           </a:xfrm>
           <a:prstGeom prst="rect">
             <a:avLst/>
@@ -21441,7 +21441,7 @@
         </p:nvSpPr>
         <p:spPr>
           <a:xfrm>
-            <a:off x="3118652" y="2989508"/>
+            <a:off x="3118652" y="2989534"/>
             <a:ext cx="565830" cy="182880"/>
           </a:xfrm>
           <a:prstGeom prst="rect">
@@ -21610,7 +21610,7 @@
                 </a:solidFill>
                 <a:latin typeface="Arial"/>
               </a:rPr>
-              <a:t>to Apr 26</a:t>
+              <a:t>LTM Apr 26</a:t>
             </a:r>
           </a:p>
         </p:txBody>
@@ -21822,7 +21822,7 @@
         <p:spPr>
           <a:xfrm>
             <a:off x="932688" y="5047488"/>
-            <a:ext cx="2240280" cy="347472"/>
+            <a:ext cx="2240280" cy="521207"/>
           </a:xfrm>
           <a:prstGeom prst="rect">
             <a:avLst/>
@@ -21847,7 +21847,7 @@
                 </a:solidFill>
                 <a:latin typeface="Arial"/>
               </a:rPr>
-              <a:t>1.4 GWh against a 50 GWh goal, and nothing paid out yet.</a:t>
+              <a:t>1.4 GWh against a 50 GWh goal. Nothing paid yet, but milestones moved out two years in Aug 2026.</a:t>
             </a:r>
           </a:p>
         </p:txBody>
@@ -25557,7 +25557,7 @@
         <p:spPr>
           <a:xfrm>
             <a:off x="2833359" y="2651760"/>
-            <a:ext cx="1900671" cy="694944"/>
+            <a:ext cx="1900671" cy="868679"/>
           </a:xfrm>
           <a:prstGeom prst="rect">
             <a:avLst/>
@@ -25582,7 +25582,7 @@
                 </a:solidFill>
                 <a:latin typeface="Arial"/>
               </a:rPr>
-              <a:t>of the world's anode material. Also 90% of cathode. The chokehold is on processing, not mines.</a:t>
+              <a:t>of the world's graphitisation, the step that makes anode material. Also 85% of cathode. The chokehold is on processing, not mines.</a:t>
             </a:r>
           </a:p>
         </p:txBody>
@@ -25617,7 +25617,7 @@
                 </a:solidFill>
                 <a:latin typeface="Arial"/>
               </a:rPr>
-              <a:t>₹1.6</a:t>
+              <a:t>₹1.5</a:t>
             </a:r>
             <a:r>
               <a:rPr sz="1300" b="1">
@@ -26054,7 +26054,7 @@
                 </a:solidFill>
                 <a:latin typeface="Arial"/>
               </a:rPr>
-              <a:t>Europe tried to beat China on size and lost about ₹1.6 lakh crore trying. The few European battery firms still alive did the opposite: they stayed small and specialised, and sold where price per unit is not the deciding factor. UniverCell is the clearest live test of that second idea, and its own numbers do not yet match its story.</a:t>
+              <a:t>Europe tried to beat China on size and lost about ₹1.5 lakh crore trying. The few European battery firms still alive did the opposite: they stayed small and specialised, and sold where price per unit is not the deciding factor. UniverCell is the clearest live test of that second idea, and its own numbers do not yet match its story.</a:t>
             </a:r>
           </a:p>
         </p:txBody>
@@ -30404,7 +30404,7 @@
                 </a:solidFill>
                 <a:latin typeface="Arial"/>
               </a:rPr>
-              <a:t>China's share of world capacity, step by step</a:t>
+              <a:t>China's share of each step of the chain</a:t>
             </a:r>
           </a:p>
         </p:txBody>
@@ -30439,7 +30439,7 @@
                 </a:solidFill>
                 <a:latin typeface="Arial"/>
               </a:rPr>
-              <a:t>percent of global capacity, 2024 to 2025</a:t>
+              <a:t>percent of the world total; refining and mining are output, anode and cathode capacity</a:t>
             </a:r>
           </a:p>
         </p:txBody>
@@ -30474,7 +30474,7 @@
                 </a:solidFill>
                 <a:latin typeface="Arial"/>
               </a:rPr>
-              <a:t>Anode material</a:t>
+              <a:t>Graphite refining</a:t>
             </a:r>
           </a:p>
         </p:txBody>
@@ -30530,7 +30530,7 @@
         <p:spPr>
           <a:xfrm>
             <a:off x="2761488" y="2907792"/>
-            <a:ext cx="3441070" cy="201168"/>
+            <a:ext cx="3300618" cy="201168"/>
           </a:xfrm>
           <a:prstGeom prst="rect">
             <a:avLst/>
@@ -30593,7 +30593,7 @@
                 </a:solidFill>
                 <a:latin typeface="Arial"/>
               </a:rPr>
-              <a:t>98%</a:t>
+              <a:t>94%</a:t>
             </a:r>
           </a:p>
         </p:txBody>
@@ -30628,7 +30628,7 @@
                 </a:solidFill>
                 <a:latin typeface="Arial"/>
               </a:rPr>
-              <a:t>Battery-grade graphite</a:t>
+              <a:t>Anode material</a:t>
             </a:r>
           </a:p>
         </p:txBody>
@@ -30684,7 +30684,7 @@
         <p:spPr>
           <a:xfrm>
             <a:off x="2761488" y="3278124"/>
-            <a:ext cx="3300618" cy="201168"/>
+            <a:ext cx="3160166" cy="201168"/>
           </a:xfrm>
           <a:prstGeom prst="rect">
             <a:avLst/>
@@ -30747,7 +30747,7 @@
                 </a:solidFill>
                 <a:latin typeface="Arial"/>
               </a:rPr>
-              <a:t>94%</a:t>
+              <a:t>90%</a:t>
             </a:r>
           </a:p>
         </p:txBody>
@@ -30838,7 +30838,7 @@
         <p:spPr>
           <a:xfrm>
             <a:off x="2761488" y="3648456"/>
-            <a:ext cx="3160166" cy="201168"/>
+            <a:ext cx="2984601" cy="201168"/>
           </a:xfrm>
           <a:prstGeom prst="rect">
             <a:avLst/>
@@ -30901,7 +30901,7 @@
                 </a:solidFill>
                 <a:latin typeface="Arial"/>
               </a:rPr>
-              <a:t>90%</a:t>
+              <a:t>85%</a:t>
             </a:r>
           </a:p>
         </p:txBody>
@@ -30992,7 +30992,7 @@
         <p:spPr>
           <a:xfrm>
             <a:off x="2761488" y="4018788"/>
-            <a:ext cx="2984601" cy="201168"/>
+            <a:ext cx="2809036" cy="201168"/>
           </a:xfrm>
           <a:prstGeom prst="rect">
             <a:avLst/>
@@ -31055,7 +31055,7 @@
                 </a:solidFill>
                 <a:latin typeface="Arial"/>
               </a:rPr>
-              <a:t>85%</a:t>
+              <a:t>80%</a:t>
             </a:r>
           </a:p>
         </p:txBody>
@@ -31300,7 +31300,7 @@
         <p:spPr>
           <a:xfrm>
             <a:off x="2761488" y="4759452"/>
-            <a:ext cx="2598359" cy="201168"/>
+            <a:ext cx="2633472" cy="201168"/>
           </a:xfrm>
           <a:prstGeom prst="rect">
             <a:avLst/>
@@ -31363,7 +31363,7 @@
                 </a:solidFill>
                 <a:latin typeface="Arial"/>
               </a:rPr>
-              <a:t>74%</a:t>
+              <a:t>75%</a:t>
             </a:r>
           </a:p>
         </p:txBody>
@@ -31608,7 +31608,7 @@
         <p:spPr>
           <a:xfrm>
             <a:off x="2761488" y="5500116"/>
-            <a:ext cx="561807" cy="201168"/>
+            <a:ext cx="596920" cy="201168"/>
           </a:xfrm>
           <a:prstGeom prst="rect">
             <a:avLst/>
@@ -31671,7 +31671,7 @@
                 </a:solidFill>
                 <a:latin typeface="Arial"/>
               </a:rPr>
-              <a:t>16%</a:t>
+              <a:t>17%</a:t>
             </a:r>
           </a:p>
         </p:txBody>
@@ -31727,7 +31727,7 @@
         <p:spPr>
           <a:xfrm>
             <a:off x="7671816" y="2103120"/>
-            <a:ext cx="4507992" cy="553212"/>
+            <a:ext cx="4507992" cy="737616"/>
           </a:xfrm>
           <a:prstGeom prst="rect">
             <a:avLst/>
@@ -31761,7 +31761,7 @@
                 </a:solidFill>
                 <a:latin typeface="Arial"/>
               </a:rPr>
-              <a:t>China's grip on refining rose from 82% to 86% between 2020 and 2024, straight through the West's whole effort to break it.</a:t>
+              <a:t>The top three refining nations' combined share of key minerals rose from 82% to 86% between 2020 and 2024, straight through the West's whole effort to break it. China leads five of the six.</a:t>
             </a:r>
           </a:p>
         </p:txBody>
@@ -31774,7 +31774,7 @@
         </p:nvSpPr>
         <p:spPr>
           <a:xfrm>
-            <a:off x="7470648" y="2920593"/>
+            <a:off x="7470648" y="3104997"/>
             <a:ext cx="73152" cy="73152"/>
           </a:xfrm>
           <a:prstGeom prst="rect">
@@ -31816,7 +31816,7 @@
         </p:nvSpPr>
         <p:spPr>
           <a:xfrm>
-            <a:off x="7671816" y="2839211"/>
+            <a:off x="7671816" y="3023616"/>
             <a:ext cx="4507992" cy="553212"/>
           </a:xfrm>
           <a:prstGeom prst="rect">
@@ -31864,7 +31864,7 @@
         </p:nvSpPr>
         <p:spPr>
           <a:xfrm>
-            <a:off x="7470648" y="3656685"/>
+            <a:off x="7470648" y="3841089"/>
             <a:ext cx="73152" cy="73152"/>
           </a:xfrm>
           <a:prstGeom prst="rect">
@@ -31906,7 +31906,7 @@
         </p:nvSpPr>
         <p:spPr>
           <a:xfrm>
-            <a:off x="7671816" y="3575303"/>
+            <a:off x="7671816" y="3759707"/>
             <a:ext cx="4507992" cy="553212"/>
           </a:xfrm>
           <a:prstGeom prst="rect">
@@ -31954,7 +31954,7 @@
         </p:nvSpPr>
         <p:spPr>
           <a:xfrm>
-            <a:off x="7470648" y="4392777"/>
+            <a:off x="7470648" y="4577181"/>
             <a:ext cx="73152" cy="73152"/>
           </a:xfrm>
           <a:prstGeom prst="rect">
@@ -31996,7 +31996,7 @@
         </p:nvSpPr>
         <p:spPr>
           <a:xfrm>
-            <a:off x="7671816" y="4311395"/>
+            <a:off x="7671816" y="4495799"/>
             <a:ext cx="4507992" cy="553212"/>
           </a:xfrm>
           <a:prstGeom prst="rect">
@@ -33025,7 +33025,7 @@
                 </a:solidFill>
                 <a:latin typeface="Arial"/>
               </a:rPr>
-              <a:t>rupees of cells bought, twelve months to end-2025</a:t>
+              <a:t>rupees of lithium-ion batteries, twelve-month windows ending Oct 2025 to Jan 2026</a:t>
             </a:r>
           </a:p>
         </p:txBody>
@@ -34534,7 +34534,7 @@
                 </a:solidFill>
                 <a:latin typeface="Arial"/>
               </a:rPr>
-              <a:t>₹2.7 lakh crore of imports. It passed the United States in May 2025.</a:t>
+              <a:t>₹2.7 lakh crore of imports, and ahead of the United States since 2023.</a:t>
             </a:r>
           </a:p>
         </p:txBody>
